--- a/chapter7/parts/part-02-types-of-dataset-bias/clip.pptx
+++ b/chapter7/parts/part-02-types-of-dataset-bias/clip.pptx
@@ -4398,10 +4398,12 @@
           </a:bodyPr>
           <a:lstStyle/>
           <a:p>
-            <a:pPr>
+            <a:pPr lvl="0" marL="457200" indent="-228600">
+              <a:buFont typeface="Calibri"/>
               <a:spcAft>
                 <a:spcPts val="1000"/>
               </a:spcAft>
+              <a:buSzPct val="100000"/>
               <a:buChar char="•"/>
               <a:lnSpc>
                 <a:spcPts val="2200"/>
@@ -4418,10 +4420,12 @@
             </a:r>
           </a:p>
           <a:p>
-            <a:pPr>
+            <a:pPr lvl="0" marL="457200" indent="-228600">
+              <a:buFont typeface="Calibri"/>
               <a:spcAft>
                 <a:spcPts val="1000"/>
               </a:spcAft>
+              <a:buSzPct val="100000"/>
               <a:buChar char="•"/>
               <a:lnSpc>
                 <a:spcPts val="2200"/>
@@ -4438,10 +4442,12 @@
             </a:r>
           </a:p>
           <a:p>
-            <a:pPr>
+            <a:pPr lvl="0" marL="457200" indent="-228600">
+              <a:buFont typeface="Calibri"/>
               <a:spcAft>
                 <a:spcPts val="1000"/>
               </a:spcAft>
+              <a:buSzPct val="100000"/>
               <a:buChar char="•"/>
               <a:lnSpc>
                 <a:spcPts val="2200"/>
@@ -4577,10 +4583,12 @@
           </a:bodyPr>
           <a:lstStyle/>
           <a:p>
-            <a:pPr>
+            <a:pPr lvl="0" marL="457200" indent="-228600">
+              <a:buFont typeface="Calibri"/>
               <a:spcAft>
                 <a:spcPts val="1000"/>
               </a:spcAft>
+              <a:buSzPct val="100000"/>
               <a:buChar char="•"/>
               <a:lnSpc>
                 <a:spcPts val="2200"/>
@@ -4597,10 +4605,12 @@
             </a:r>
           </a:p>
           <a:p>
-            <a:pPr>
+            <a:pPr lvl="0" marL="457200" indent="-228600">
+              <a:buFont typeface="Calibri"/>
               <a:spcAft>
                 <a:spcPts val="1000"/>
               </a:spcAft>
+              <a:buSzPct val="100000"/>
               <a:buChar char="•"/>
               <a:lnSpc>
                 <a:spcPts val="2200"/>
@@ -4617,10 +4627,12 @@
             </a:r>
           </a:p>
           <a:p>
-            <a:pPr>
+            <a:pPr lvl="0" marL="457200" indent="-228600">
+              <a:buFont typeface="Calibri"/>
               <a:spcAft>
                 <a:spcPts val="1000"/>
               </a:spcAft>
+              <a:buSzPct val="100000"/>
               <a:buChar char="•"/>
               <a:lnSpc>
                 <a:spcPts val="2200"/>
@@ -4756,10 +4768,12 @@
           </a:bodyPr>
           <a:lstStyle/>
           <a:p>
-            <a:pPr>
+            <a:pPr lvl="0" marL="457200" indent="-228600">
+              <a:buFont typeface="Calibri"/>
               <a:spcAft>
                 <a:spcPts val="1000"/>
               </a:spcAft>
+              <a:buSzPct val="100000"/>
               <a:buChar char="•"/>
               <a:lnSpc>
                 <a:spcPts val="2200"/>
@@ -4776,10 +4790,12 @@
             </a:r>
           </a:p>
           <a:p>
-            <a:pPr>
+            <a:pPr lvl="0" marL="457200" indent="-228600">
+              <a:buFont typeface="Calibri"/>
               <a:spcAft>
                 <a:spcPts val="1000"/>
               </a:spcAft>
+              <a:buSzPct val="100000"/>
               <a:buChar char="•"/>
               <a:lnSpc>
                 <a:spcPts val="2200"/>
@@ -4915,10 +4931,12 @@
           </a:bodyPr>
           <a:lstStyle/>
           <a:p>
-            <a:pPr>
+            <a:pPr lvl="0" marL="457200" indent="-228600">
+              <a:buFont typeface="Calibri"/>
               <a:spcAft>
                 <a:spcPts val="1000"/>
               </a:spcAft>
+              <a:buSzPct val="100000"/>
               <a:buChar char="•"/>
               <a:lnSpc>
                 <a:spcPts val="2200"/>
@@ -5054,10 +5072,12 @@
           </a:bodyPr>
           <a:lstStyle/>
           <a:p>
-            <a:pPr>
+            <a:pPr lvl="0" marL="457200" indent="-228600">
+              <a:buFont typeface="Calibri"/>
               <a:spcAft>
                 <a:spcPts val="1000"/>
               </a:spcAft>
+              <a:buSzPct val="100000"/>
               <a:buChar char="•"/>
               <a:lnSpc>
                 <a:spcPts val="2200"/>
@@ -5074,10 +5094,12 @@
             </a:r>
           </a:p>
           <a:p>
-            <a:pPr>
+            <a:pPr lvl="0" marL="457200" indent="-228600">
+              <a:buFont typeface="Calibri"/>
               <a:spcAft>
                 <a:spcPts val="1000"/>
               </a:spcAft>
+              <a:buSzPct val="100000"/>
               <a:buChar char="•"/>
               <a:lnSpc>
                 <a:spcPts val="2200"/>
@@ -5094,10 +5116,12 @@
             </a:r>
           </a:p>
           <a:p>
-            <a:pPr>
+            <a:pPr lvl="0" marL="457200" indent="-228600">
+              <a:buFont typeface="Calibri"/>
               <a:spcAft>
                 <a:spcPts val="1000"/>
               </a:spcAft>
+              <a:buSzPct val="100000"/>
               <a:buChar char="•"/>
               <a:lnSpc>
                 <a:spcPts val="2200"/>
@@ -5233,10 +5257,12 @@
           </a:bodyPr>
           <a:lstStyle/>
           <a:p>
-            <a:pPr>
+            <a:pPr lvl="0" marL="457200" indent="-228600">
+              <a:buFont typeface="Calibri"/>
               <a:spcAft>
                 <a:spcPts val="1000"/>
               </a:spcAft>
+              <a:buSzPct val="100000"/>
               <a:buChar char="•"/>
               <a:lnSpc>
                 <a:spcPts val="2200"/>
@@ -5253,10 +5279,12 @@
             </a:r>
           </a:p>
           <a:p>
-            <a:pPr>
+            <a:pPr lvl="0" marL="457200" indent="-228600">
+              <a:buFont typeface="Calibri"/>
               <a:spcAft>
                 <a:spcPts val="1000"/>
               </a:spcAft>
+              <a:buSzPct val="100000"/>
               <a:buChar char="•"/>
               <a:lnSpc>
                 <a:spcPts val="2200"/>
@@ -5273,10 +5301,12 @@
             </a:r>
           </a:p>
           <a:p>
-            <a:pPr>
+            <a:pPr lvl="0" marL="457200" indent="-228600">
+              <a:buFont typeface="Calibri"/>
               <a:spcAft>
                 <a:spcPts val="1000"/>
               </a:spcAft>
+              <a:buSzPct val="100000"/>
               <a:buChar char="•"/>
               <a:lnSpc>
                 <a:spcPts val="2200"/>
@@ -5293,10 +5323,12 @@
             </a:r>
           </a:p>
           <a:p>
-            <a:pPr>
+            <a:pPr lvl="0" marL="457200" indent="-228600">
+              <a:buFont typeface="Calibri"/>
               <a:spcAft>
                 <a:spcPts val="1000"/>
               </a:spcAft>
+              <a:buSzPct val="100000"/>
               <a:buChar char="•"/>
               <a:lnSpc>
                 <a:spcPts val="2200"/>
@@ -5313,10 +5345,12 @@
             </a:r>
           </a:p>
           <a:p>
-            <a:pPr>
+            <a:pPr lvl="0" marL="457200" indent="-228600">
+              <a:buFont typeface="Calibri"/>
               <a:spcAft>
                 <a:spcPts val="1000"/>
               </a:spcAft>
+              <a:buSzPct val="100000"/>
               <a:buChar char="•"/>
               <a:lnSpc>
                 <a:spcPts val="2200"/>
@@ -5333,10 +5367,12 @@
             </a:r>
           </a:p>
           <a:p>
-            <a:pPr>
+            <a:pPr lvl="0" marL="457200" indent="-228600">
+              <a:buFont typeface="Calibri"/>
               <a:spcAft>
                 <a:spcPts val="1000"/>
               </a:spcAft>
+              <a:buSzPct val="100000"/>
               <a:buChar char="•"/>
               <a:lnSpc>
                 <a:spcPts val="2200"/>
@@ -5472,10 +5508,12 @@
           </a:bodyPr>
           <a:lstStyle/>
           <a:p>
-            <a:pPr>
+            <a:pPr lvl="0" marL="457200" indent="-228600">
+              <a:buFont typeface="Calibri"/>
               <a:spcAft>
                 <a:spcPts val="1000"/>
               </a:spcAft>
+              <a:buSzPct val="100000"/>
               <a:buChar char="•"/>
               <a:lnSpc>
                 <a:spcPts val="2200"/>
@@ -5492,10 +5530,12 @@
             </a:r>
           </a:p>
           <a:p>
-            <a:pPr>
+            <a:pPr lvl="0" marL="457200" indent="-228600">
+              <a:buFont typeface="Calibri"/>
               <a:spcAft>
                 <a:spcPts val="1000"/>
               </a:spcAft>
+              <a:buSzPct val="100000"/>
               <a:buChar char="•"/>
               <a:lnSpc>
                 <a:spcPts val="2200"/>
@@ -5512,10 +5552,12 @@
             </a:r>
           </a:p>
           <a:p>
-            <a:pPr>
+            <a:pPr lvl="0" marL="457200" indent="-228600">
+              <a:buFont typeface="Calibri"/>
               <a:spcAft>
                 <a:spcPts val="1000"/>
               </a:spcAft>
+              <a:buSzPct val="100000"/>
               <a:buChar char="•"/>
               <a:lnSpc>
                 <a:spcPts val="2200"/>
@@ -5532,10 +5574,12 @@
             </a:r>
           </a:p>
           <a:p>
-            <a:pPr>
+            <a:pPr lvl="0" marL="457200" indent="-228600">
+              <a:buFont typeface="Calibri"/>
               <a:spcAft>
                 <a:spcPts val="1000"/>
               </a:spcAft>
+              <a:buSzPct val="100000"/>
               <a:buChar char="•"/>
               <a:lnSpc>
                 <a:spcPts val="2200"/>
@@ -5552,10 +5596,12 @@
             </a:r>
           </a:p>
           <a:p>
-            <a:pPr>
+            <a:pPr lvl="0" marL="457200" indent="-228600">
+              <a:buFont typeface="Calibri"/>
               <a:spcAft>
                 <a:spcPts val="1000"/>
               </a:spcAft>
+              <a:buSzPct val="100000"/>
               <a:buChar char="•"/>
               <a:lnSpc>
                 <a:spcPts val="2200"/>
@@ -5572,10 +5618,12 @@
             </a:r>
           </a:p>
           <a:p>
-            <a:pPr>
+            <a:pPr lvl="0" marL="457200" indent="-228600">
+              <a:buFont typeface="Calibri"/>
               <a:spcAft>
                 <a:spcPts val="1000"/>
               </a:spcAft>
+              <a:buSzPct val="100000"/>
               <a:buChar char="•"/>
               <a:lnSpc>
                 <a:spcPts val="2200"/>
@@ -5711,10 +5759,12 @@
           </a:bodyPr>
           <a:lstStyle/>
           <a:p>
-            <a:pPr>
+            <a:pPr lvl="0" marL="457200" indent="-228600">
+              <a:buFont typeface="Calibri"/>
               <a:spcAft>
                 <a:spcPts val="1000"/>
               </a:spcAft>
+              <a:buSzPct val="100000"/>
               <a:buChar char="•"/>
               <a:lnSpc>
                 <a:spcPts val="2200"/>
@@ -5731,10 +5781,12 @@
             </a:r>
           </a:p>
           <a:p>
-            <a:pPr>
+            <a:pPr lvl="0" marL="457200" indent="-228600">
+              <a:buFont typeface="Calibri"/>
               <a:spcAft>
                 <a:spcPts val="1000"/>
               </a:spcAft>
+              <a:buSzPct val="100000"/>
               <a:buChar char="•"/>
               <a:lnSpc>
                 <a:spcPts val="2200"/>
@@ -5751,10 +5803,12 @@
             </a:r>
           </a:p>
           <a:p>
-            <a:pPr>
+            <a:pPr lvl="0" marL="457200" indent="-228600">
+              <a:buFont typeface="Calibri"/>
               <a:spcAft>
                 <a:spcPts val="1000"/>
               </a:spcAft>
+              <a:buSzPct val="100000"/>
               <a:buChar char="•"/>
               <a:lnSpc>
                 <a:spcPts val="2200"/>
@@ -5771,10 +5825,12 @@
             </a:r>
           </a:p>
           <a:p>
-            <a:pPr>
+            <a:pPr lvl="0" marL="457200" indent="-228600">
+              <a:buFont typeface="Calibri"/>
               <a:spcAft>
                 <a:spcPts val="1000"/>
               </a:spcAft>
+              <a:buSzPct val="100000"/>
               <a:buChar char="•"/>
               <a:lnSpc>
                 <a:spcPts val="2200"/>
@@ -5791,10 +5847,12 @@
             </a:r>
           </a:p>
           <a:p>
-            <a:pPr>
+            <a:pPr lvl="0" marL="457200" indent="-228600">
+              <a:buFont typeface="Calibri"/>
               <a:spcAft>
                 <a:spcPts val="1000"/>
               </a:spcAft>
+              <a:buSzPct val="100000"/>
               <a:buChar char="•"/>
               <a:lnSpc>
                 <a:spcPts val="2200"/>
@@ -5811,10 +5869,12 @@
             </a:r>
           </a:p>
           <a:p>
-            <a:pPr>
+            <a:pPr lvl="0" marL="457200" indent="-228600">
+              <a:buFont typeface="Calibri"/>
               <a:spcAft>
                 <a:spcPts val="1000"/>
               </a:spcAft>
+              <a:buSzPct val="100000"/>
               <a:buChar char="•"/>
               <a:lnSpc>
                 <a:spcPts val="2200"/>
@@ -5950,10 +6010,12 @@
           </a:bodyPr>
           <a:lstStyle/>
           <a:p>
-            <a:pPr>
+            <a:pPr lvl="0" marL="457200" indent="-228600">
+              <a:buFont typeface="Calibri"/>
               <a:spcAft>
                 <a:spcPts val="1000"/>
               </a:spcAft>
+              <a:buSzPct val="100000"/>
               <a:buChar char="•"/>
               <a:lnSpc>
                 <a:spcPts val="2200"/>
@@ -5970,10 +6032,12 @@
             </a:r>
           </a:p>
           <a:p>
-            <a:pPr>
+            <a:pPr lvl="0" marL="457200" indent="-228600">
+              <a:buFont typeface="Calibri"/>
               <a:spcAft>
                 <a:spcPts val="1000"/>
               </a:spcAft>
+              <a:buSzPct val="100000"/>
               <a:buChar char="•"/>
               <a:lnSpc>
                 <a:spcPts val="2200"/>
@@ -5990,10 +6054,12 @@
             </a:r>
           </a:p>
           <a:p>
-            <a:pPr>
+            <a:pPr lvl="0" marL="457200" indent="-228600">
+              <a:buFont typeface="Calibri"/>
               <a:spcAft>
                 <a:spcPts val="1000"/>
               </a:spcAft>
+              <a:buSzPct val="100000"/>
               <a:buChar char="•"/>
               <a:lnSpc>
                 <a:spcPts val="2200"/>
@@ -6010,10 +6076,12 @@
             </a:r>
           </a:p>
           <a:p>
-            <a:pPr>
+            <a:pPr lvl="0" marL="457200" indent="-228600">
+              <a:buFont typeface="Calibri"/>
               <a:spcAft>
                 <a:spcPts val="1000"/>
               </a:spcAft>
+              <a:buSzPct val="100000"/>
               <a:buChar char="•"/>
               <a:lnSpc>
                 <a:spcPts val="2200"/>
@@ -6030,10 +6098,12 @@
             </a:r>
           </a:p>
           <a:p>
-            <a:pPr>
+            <a:pPr lvl="0" marL="457200" indent="-228600">
+              <a:buFont typeface="Calibri"/>
               <a:spcAft>
                 <a:spcPts val="1000"/>
               </a:spcAft>
+              <a:buSzPct val="100000"/>
               <a:buChar char="•"/>
               <a:lnSpc>
                 <a:spcPts val="2200"/>
@@ -6632,10 +6702,12 @@
           </a:bodyPr>
           <a:lstStyle/>
           <a:p>
-            <a:pPr>
+            <a:pPr lvl="0" marL="457200" indent="-228600">
+              <a:buFont typeface="Calibri"/>
               <a:spcAft>
                 <a:spcPts val="1000"/>
               </a:spcAft>
+              <a:buSzPct val="100000"/>
               <a:buChar char="•"/>
               <a:lnSpc>
                 <a:spcPts val="2200"/>
@@ -6652,10 +6724,12 @@
             </a:r>
           </a:p>
           <a:p>
-            <a:pPr>
+            <a:pPr lvl="0" marL="457200" indent="-228600">
+              <a:buFont typeface="Calibri"/>
               <a:spcAft>
                 <a:spcPts val="1000"/>
               </a:spcAft>
+              <a:buSzPct val="100000"/>
               <a:buChar char="•"/>
               <a:lnSpc>
                 <a:spcPts val="2200"/>
@@ -6672,10 +6746,12 @@
             </a:r>
           </a:p>
           <a:p>
-            <a:pPr>
+            <a:pPr lvl="0" marL="457200" indent="-228600">
+              <a:buFont typeface="Calibri"/>
               <a:spcAft>
                 <a:spcPts val="1000"/>
               </a:spcAft>
+              <a:buSzPct val="100000"/>
               <a:buChar char="•"/>
               <a:lnSpc>
                 <a:spcPts val="2200"/>
